--- a/Презентация Мухаммаджона (Защита).pptx
+++ b/Презентация Мухаммаджона (Защита).pptx
@@ -15424,346 +15424,6 @@
           </a:graphicData>
         </a:graphic>
       </p:graphicFrame>
-      <p:sp>
-        <p:nvSpPr>
-          <p:cNvPr id="11" name="Прямоугольник 10"/>
-          <p:cNvSpPr/>
-          <p:nvPr/>
-        </p:nvSpPr>
-        <p:spPr>
-          <a:xfrm>
-            <a:off x="539762" y="4600099"/>
-            <a:ext cx="7838660" cy="246221"/>
-          </a:xfrm>
-          <a:prstGeom prst="rect">
-            <a:avLst/>
-          </a:prstGeom>
-        </p:spPr>
-        <p:txBody>
-          <a:bodyPr wrap="square">
-            <a:spAutoFit/>
-          </a:bodyPr>
-          <a:lstStyle/>
-          <a:p>
-            <a:r>
-              <a:rPr lang="ru-RU" sz="1000" b="1" dirty="0">
-                <a:solidFill>
-                  <a:srgbClr val="660033"/>
-                </a:solidFill>
-                <a:latin typeface="Calibri" panose="020F0502020204030204" pitchFamily="34" charset="0"/>
-                <a:ea typeface="Calibri" panose="020F0502020204030204" pitchFamily="34" charset="0"/>
-                <a:cs typeface="Calibri" panose="020F0502020204030204" pitchFamily="34" charset="0"/>
-              </a:rPr>
-              <a:t>PL Польша:</a:t>
-            </a:r>
-            <a:r>
-              <a:rPr lang="ru-RU" sz="1000" b="1" dirty="0">
-                <a:latin typeface="Calibri" panose="020F0502020204030204" pitchFamily="34" charset="0"/>
-                <a:ea typeface="Calibri" panose="020F0502020204030204" pitchFamily="34" charset="0"/>
-                <a:cs typeface="Calibri" panose="020F0502020204030204" pitchFamily="34" charset="0"/>
-              </a:rPr>
-              <a:t> </a:t>
-            </a:r>
-            <a:r>
-              <a:rPr lang="ru-RU" sz="1000" dirty="0">
-                <a:latin typeface="Calibri" panose="020F0502020204030204" pitchFamily="34" charset="0"/>
-                <a:ea typeface="Calibri" panose="020F0502020204030204" pitchFamily="34" charset="0"/>
-                <a:cs typeface="Calibri" panose="020F0502020204030204" pitchFamily="34" charset="0"/>
-              </a:rPr>
-              <a:t>Программа «Цифровая Польша» 2014–2020 </a:t>
-            </a:r>
-            <a:r>
-              <a:rPr lang="en-US" sz="1000" dirty="0" smtClean="0">
-                <a:latin typeface="Calibri" panose="020F0502020204030204" pitchFamily="34" charset="0"/>
-                <a:ea typeface="Calibri" panose="020F0502020204030204" pitchFamily="34" charset="0"/>
-                <a:cs typeface="Calibri" panose="020F0502020204030204" pitchFamily="34" charset="0"/>
-              </a:rPr>
-              <a:t>-</a:t>
-            </a:r>
-            <a:r>
-              <a:rPr lang="ru-RU" sz="1000" dirty="0" smtClean="0">
-                <a:latin typeface="Calibri" panose="020F0502020204030204" pitchFamily="34" charset="0"/>
-                <a:ea typeface="Calibri" panose="020F0502020204030204" pitchFamily="34" charset="0"/>
-                <a:cs typeface="Calibri" panose="020F0502020204030204" pitchFamily="34" charset="0"/>
-              </a:rPr>
-              <a:t> </a:t>
-            </a:r>
-            <a:r>
-              <a:rPr lang="ru-RU" sz="1000" dirty="0">
-                <a:latin typeface="Calibri" panose="020F0502020204030204" pitchFamily="34" charset="0"/>
-                <a:ea typeface="Calibri" panose="020F0502020204030204" pitchFamily="34" charset="0"/>
-                <a:cs typeface="Calibri" panose="020F0502020204030204" pitchFamily="34" charset="0"/>
-              </a:rPr>
-              <a:t>2,17 млрд евро. </a:t>
-            </a:r>
-            <a:r>
-              <a:rPr lang="ru-RU" sz="1000" dirty="0" err="1">
-                <a:latin typeface="Calibri" panose="020F0502020204030204" pitchFamily="34" charset="0"/>
-                <a:ea typeface="Calibri" panose="020F0502020204030204" pitchFamily="34" charset="0"/>
-                <a:cs typeface="Calibri" panose="020F0502020204030204" pitchFamily="34" charset="0"/>
-              </a:rPr>
-              <a:t>mObywatel</a:t>
-            </a:r>
-            <a:r>
-              <a:rPr lang="ru-RU" sz="1000" dirty="0">
-                <a:latin typeface="Calibri" panose="020F0502020204030204" pitchFamily="34" charset="0"/>
-                <a:ea typeface="Calibri" panose="020F0502020204030204" pitchFamily="34" charset="0"/>
-                <a:cs typeface="Calibri" panose="020F0502020204030204" pitchFamily="34" charset="0"/>
-              </a:rPr>
-              <a:t>: 10+ млн пользователей, 40+ </a:t>
-            </a:r>
-            <a:r>
-              <a:rPr lang="ru-RU" sz="1000" dirty="0" err="1">
-                <a:latin typeface="Calibri" panose="020F0502020204030204" pitchFamily="34" charset="0"/>
-                <a:ea typeface="Calibri" panose="020F0502020204030204" pitchFamily="34" charset="0"/>
-                <a:cs typeface="Calibri" panose="020F0502020204030204" pitchFamily="34" charset="0"/>
-              </a:rPr>
-              <a:t>госуслуг</a:t>
-            </a:r>
-            <a:r>
-              <a:rPr lang="ru-RU" sz="1000" dirty="0">
-                <a:latin typeface="Calibri" panose="020F0502020204030204" pitchFamily="34" charset="0"/>
-                <a:ea typeface="Calibri" panose="020F0502020204030204" pitchFamily="34" charset="0"/>
-                <a:cs typeface="Calibri" panose="020F0502020204030204" pitchFamily="34" charset="0"/>
-              </a:rPr>
-              <a:t>.</a:t>
-            </a:r>
-            <a:endParaRPr lang="en-US" sz="1000" dirty="0">
-              <a:latin typeface="Calibri" panose="020F0502020204030204" pitchFamily="34" charset="0"/>
-              <a:ea typeface="Calibri" panose="020F0502020204030204" pitchFamily="34" charset="0"/>
-              <a:cs typeface="Calibri" panose="020F0502020204030204" pitchFamily="34" charset="0"/>
-            </a:endParaRPr>
-          </a:p>
-        </p:txBody>
-      </p:sp>
-      <p:sp>
-        <p:nvSpPr>
-          <p:cNvPr id="12" name="Text 5"/>
-          <p:cNvSpPr/>
-          <p:nvPr/>
-        </p:nvSpPr>
-        <p:spPr>
-          <a:xfrm>
-            <a:off x="612648" y="4022437"/>
-            <a:ext cx="8229600" cy="201168"/>
-          </a:xfrm>
-          <a:prstGeom prst="rect">
-            <a:avLst/>
-          </a:prstGeom>
-          <a:noFill/>
-          <a:ln/>
-        </p:spPr>
-        <p:txBody>
-          <a:bodyPr wrap="square" lIns="0" tIns="0" rIns="0" bIns="0" rtlCol="0" anchor="t"/>
-          <a:lstStyle/>
-          <a:p>
-            <a:pPr marL="0" indent="0">
-              <a:buNone/>
-            </a:pPr>
-            <a:r>
-              <a:rPr lang="en-US" sz="1000" b="1" dirty="0" smtClean="0">
-                <a:solidFill>
-                  <a:srgbClr val="6D2E46"/>
-                </a:solidFill>
-                <a:latin typeface="Calibri" panose="020F0502020204030204" pitchFamily="34" charset="0"/>
-                <a:ea typeface="Calibri" panose="020F0502020204030204" pitchFamily="34" charset="0"/>
-                <a:cs typeface="Calibri" panose="020F0502020204030204" pitchFamily="34" charset="0"/>
-              </a:rPr>
-              <a:t>🇪🇪 </a:t>
-            </a:r>
-            <a:r>
-              <a:rPr lang="en-US" sz="1000" b="1" dirty="0" err="1" smtClean="0">
-                <a:solidFill>
-                  <a:srgbClr val="6D2E46"/>
-                </a:solidFill>
-                <a:latin typeface="Calibri" panose="020F0502020204030204" pitchFamily="34" charset="0"/>
-                <a:ea typeface="Calibri" panose="020F0502020204030204" pitchFamily="34" charset="0"/>
-                <a:cs typeface="Calibri" panose="020F0502020204030204" pitchFamily="34" charset="0"/>
-              </a:rPr>
-              <a:t>Эстония</a:t>
-            </a:r>
-            <a:r>
-              <a:rPr lang="en-US" sz="1000" b="1" dirty="0" smtClean="0">
-                <a:solidFill>
-                  <a:srgbClr val="6D2E46"/>
-                </a:solidFill>
-                <a:latin typeface="Calibri" panose="020F0502020204030204" pitchFamily="34" charset="0"/>
-                <a:ea typeface="Calibri" panose="020F0502020204030204" pitchFamily="34" charset="0"/>
-                <a:cs typeface="Calibri" panose="020F0502020204030204" pitchFamily="34" charset="0"/>
-              </a:rPr>
-              <a:t>: </a:t>
-            </a:r>
-            <a:r>
-              <a:rPr lang="en-US" sz="1000" dirty="0">
-                <a:solidFill>
-                  <a:srgbClr val="2D2D2D"/>
-                </a:solidFill>
-                <a:latin typeface="Calibri" panose="020F0502020204030204" pitchFamily="34" charset="0"/>
-                <a:ea typeface="Calibri" panose="020F0502020204030204" pitchFamily="34" charset="0"/>
-                <a:cs typeface="Calibri" panose="020F0502020204030204" pitchFamily="34" charset="0"/>
-              </a:rPr>
-              <a:t>X-Road </a:t>
-            </a:r>
-            <a:r>
-              <a:rPr lang="en-US" sz="1000" dirty="0" smtClean="0">
-                <a:solidFill>
-                  <a:srgbClr val="2D2D2D"/>
-                </a:solidFill>
-                <a:latin typeface="Calibri" panose="020F0502020204030204" pitchFamily="34" charset="0"/>
-                <a:ea typeface="Calibri" panose="020F0502020204030204" pitchFamily="34" charset="0"/>
-                <a:cs typeface="Calibri" panose="020F0502020204030204" pitchFamily="34" charset="0"/>
-              </a:rPr>
-              <a:t>- </a:t>
-            </a:r>
-            <a:r>
-              <a:rPr lang="en-US" sz="1000" dirty="0">
-                <a:solidFill>
-                  <a:srgbClr val="2D2D2D"/>
-                </a:solidFill>
-                <a:latin typeface="Calibri" panose="020F0502020204030204" pitchFamily="34" charset="0"/>
-                <a:ea typeface="Calibri" panose="020F0502020204030204" pitchFamily="34" charset="0"/>
-                <a:cs typeface="Calibri" panose="020F0502020204030204" pitchFamily="34" charset="0"/>
-              </a:rPr>
-              <a:t>2,2 млрд транзакций/год, объединяет 450+ организаций. e-Residency: 128 тыс. чел. из 185 стран.</a:t>
-            </a:r>
-            <a:endParaRPr lang="en-US" sz="1000" dirty="0">
-              <a:latin typeface="Calibri" panose="020F0502020204030204" pitchFamily="34" charset="0"/>
-              <a:ea typeface="Calibri" panose="020F0502020204030204" pitchFamily="34" charset="0"/>
-              <a:cs typeface="Calibri" panose="020F0502020204030204" pitchFamily="34" charset="0"/>
-            </a:endParaRPr>
-          </a:p>
-        </p:txBody>
-      </p:sp>
-      <p:sp>
-        <p:nvSpPr>
-          <p:cNvPr id="13" name="Text 6"/>
-          <p:cNvSpPr/>
-          <p:nvPr/>
-        </p:nvSpPr>
-        <p:spPr>
-          <a:xfrm>
-            <a:off x="612648" y="4223605"/>
-            <a:ext cx="8229600" cy="201168"/>
-          </a:xfrm>
-          <a:prstGeom prst="rect">
-            <a:avLst/>
-          </a:prstGeom>
-          <a:noFill/>
-          <a:ln/>
-        </p:spPr>
-        <p:txBody>
-          <a:bodyPr wrap="square" lIns="0" tIns="0" rIns="0" bIns="0" rtlCol="0" anchor="t"/>
-          <a:lstStyle/>
-          <a:p>
-            <a:pPr marL="0" indent="0">
-              <a:buNone/>
-            </a:pPr>
-            <a:r>
-              <a:rPr lang="en-US" sz="1000" b="1" dirty="0">
-                <a:solidFill>
-                  <a:srgbClr val="6D2E46"/>
-                </a:solidFill>
-                <a:latin typeface="Calibri" panose="020F0502020204030204" pitchFamily="34" charset="0"/>
-                <a:ea typeface="Calibri" panose="020F0502020204030204" pitchFamily="34" charset="0"/>
-                <a:cs typeface="Calibri" panose="020F0502020204030204" pitchFamily="34" charset="0"/>
-              </a:rPr>
-              <a:t>🇰🇷 Корея: </a:t>
-            </a:r>
-            <a:r>
-              <a:rPr lang="en-US" sz="1000" dirty="0">
-                <a:solidFill>
-                  <a:srgbClr val="2D2D2D"/>
-                </a:solidFill>
-                <a:latin typeface="Calibri" panose="020F0502020204030204" pitchFamily="34" charset="0"/>
-                <a:ea typeface="Calibri" panose="020F0502020204030204" pitchFamily="34" charset="0"/>
-                <a:cs typeface="Calibri" panose="020F0502020204030204" pitchFamily="34" charset="0"/>
-              </a:rPr>
-              <a:t>Digital New Deal (2020) </a:t>
-            </a:r>
-            <a:r>
-              <a:rPr lang="en-US" sz="1000" dirty="0" smtClean="0">
-                <a:solidFill>
-                  <a:srgbClr val="2D2D2D"/>
-                </a:solidFill>
-                <a:latin typeface="Calibri" panose="020F0502020204030204" pitchFamily="34" charset="0"/>
-                <a:ea typeface="Calibri" panose="020F0502020204030204" pitchFamily="34" charset="0"/>
-                <a:cs typeface="Calibri" panose="020F0502020204030204" pitchFamily="34" charset="0"/>
-              </a:rPr>
-              <a:t>- </a:t>
-            </a:r>
-            <a:r>
-              <a:rPr lang="en-US" sz="1000" dirty="0">
-                <a:solidFill>
-                  <a:srgbClr val="2D2D2D"/>
-                </a:solidFill>
-                <a:latin typeface="Calibri" panose="020F0502020204030204" pitchFamily="34" charset="0"/>
-                <a:ea typeface="Calibri" panose="020F0502020204030204" pitchFamily="34" charset="0"/>
-                <a:cs typeface="Calibri" panose="020F0502020204030204" pitchFamily="34" charset="0"/>
-              </a:rPr>
-              <a:t>160 трлн вон, 5,9% ВВП. Концепция DNA: Data, Network, AI.</a:t>
-            </a:r>
-            <a:endParaRPr lang="en-US" sz="1000" dirty="0">
-              <a:latin typeface="Calibri" panose="020F0502020204030204" pitchFamily="34" charset="0"/>
-              <a:ea typeface="Calibri" panose="020F0502020204030204" pitchFamily="34" charset="0"/>
-              <a:cs typeface="Calibri" panose="020F0502020204030204" pitchFamily="34" charset="0"/>
-            </a:endParaRPr>
-          </a:p>
-        </p:txBody>
-      </p:sp>
-      <p:sp>
-        <p:nvSpPr>
-          <p:cNvPr id="14" name="Text 7"/>
-          <p:cNvSpPr/>
-          <p:nvPr/>
-        </p:nvSpPr>
-        <p:spPr>
-          <a:xfrm>
-            <a:off x="612648" y="4424773"/>
-            <a:ext cx="8229600" cy="201168"/>
-          </a:xfrm>
-          <a:prstGeom prst="rect">
-            <a:avLst/>
-          </a:prstGeom>
-          <a:noFill/>
-          <a:ln/>
-        </p:spPr>
-        <p:txBody>
-          <a:bodyPr wrap="square" lIns="0" tIns="0" rIns="0" bIns="0" rtlCol="0" anchor="t"/>
-          <a:lstStyle/>
-          <a:p>
-            <a:pPr marL="0" indent="0">
-              <a:buNone/>
-            </a:pPr>
-            <a:r>
-              <a:rPr lang="en-US" sz="1000" b="1" dirty="0">
-                <a:solidFill>
-                  <a:srgbClr val="6D2E46"/>
-                </a:solidFill>
-                <a:latin typeface="Calibri" panose="020F0502020204030204" pitchFamily="34" charset="0"/>
-                <a:ea typeface="Calibri" panose="020F0502020204030204" pitchFamily="34" charset="0"/>
-                <a:cs typeface="Calibri" panose="020F0502020204030204" pitchFamily="34" charset="0"/>
-              </a:rPr>
-              <a:t>🇸🇬 Сингапур: </a:t>
-            </a:r>
-            <a:r>
-              <a:rPr lang="en-US" sz="1000" dirty="0">
-                <a:solidFill>
-                  <a:srgbClr val="2D2D2D"/>
-                </a:solidFill>
-                <a:latin typeface="Calibri" panose="020F0502020204030204" pitchFamily="34" charset="0"/>
-                <a:ea typeface="Calibri" panose="020F0502020204030204" pitchFamily="34" charset="0"/>
-                <a:cs typeface="Calibri" panose="020F0502020204030204" pitchFamily="34" charset="0"/>
-              </a:rPr>
-              <a:t>Доля цифровой экономики в ВВП выросла с 13,3% (2017) до 17,7% (2023). Smart Nation 2.0: AI for Science.</a:t>
-            </a:r>
-            <a:endParaRPr lang="en-US" sz="1000" dirty="0">
-              <a:latin typeface="Calibri" panose="020F0502020204030204" pitchFamily="34" charset="0"/>
-              <a:ea typeface="Calibri" panose="020F0502020204030204" pitchFamily="34" charset="0"/>
-              <a:cs typeface="Calibri" panose="020F0502020204030204" pitchFamily="34" charset="0"/>
-            </a:endParaRPr>
-          </a:p>
-        </p:txBody>
-      </p:sp>
       <p:pic>
         <p:nvPicPr>
           <p:cNvPr id="15" name="图片 1"/>
@@ -15792,6 +15452,478 @@
           </a:ln>
         </p:spPr>
       </p:pic>
+      <p:sp>
+        <p:nvSpPr>
+          <p:cNvPr id="11" name="Text 4a"/>
+          <p:cNvSpPr/>
+          <p:nvPr/>
+        </p:nvSpPr>
+        <p:spPr>
+          <a:xfrm>
+            <a:off x="457200" y="3870000"/>
+            <a:ext cx="8229600" cy="228600"/>
+          </a:xfrm>
+          <a:prstGeom prst="rect">
+            <a:avLst/>
+          </a:prstGeom>
+          <a:noFill/>
+          <a:ln/>
+        </p:spPr>
+        <p:txBody>
+          <a:bodyPr wrap="square" lIns="0" tIns="0" rIns="0" bIns="0" rtlCol="0" anchor="t"/>
+          <a:lstStyle/>
+          <a:p>
+            <a:pPr marL="0" indent="0">
+              <a:buNone/>
+            </a:pPr>
+            <a:r>
+              <a:rPr lang="ru-RU" sz="1000" b="1" dirty="0">
+                <a:solidFill>
+                  <a:srgbClr val="6D2E46"/>
+                </a:solidFill>
+                <a:latin typeface="Calibri" pitchFamily="34" charset="0"/>
+                <a:ea typeface="Calibri" pitchFamily="34" charset="-122"/>
+                <a:cs typeface="Calibri" pitchFamily="34" charset="-120"/>
+              </a:rPr>
+              <a:t>🇪🇪 Эстония: </a:t>
+            </a:r>
+            <a:r>
+              <a:rPr lang="ru-RU" sz="1000" dirty="0">
+                <a:solidFill>
+                  <a:srgbClr val="2D2D2D"/>
+                </a:solidFill>
+                <a:latin typeface="Calibri" pitchFamily="34" charset="0"/>
+                <a:ea typeface="Calibri" pitchFamily="34" charset="-122"/>
+                <a:cs typeface="Calibri" pitchFamily="34" charset="-120"/>
+              </a:rPr>
+              <a:t>Tiger Leap (1996) - компьютеры и интернет в каждую школу.</a:t>
+            </a:r>
+            <a:endParaRPr lang="ru-RU" sz="1000" dirty="0"/>
+          </a:p>
+          <a:p>
+            <a:pPr marL="0" indent="0">
+              <a:buNone/>
+            </a:pPr>
+            <a:r>
+              <a:rPr lang="ru-RU" sz="1000" dirty="0">
+                <a:solidFill>
+                  <a:srgbClr val="2D2D2D"/>
+                </a:solidFill>
+                <a:latin typeface="Calibri" pitchFamily="34" charset="0"/>
+                <a:ea typeface="Calibri" pitchFamily="34" charset="-122"/>
+                <a:cs typeface="Calibri" pitchFamily="34" charset="-120"/>
+              </a:rPr>
+              <a:t>X-Road (2001) - платформа межведомственного обмена данными,</a:t>
+            </a:r>
+            <a:endParaRPr lang="ru-RU" sz="1000" dirty="0"/>
+          </a:p>
+          <a:p>
+            <a:pPr marL="0" indent="0">
+              <a:buNone/>
+            </a:pPr>
+            <a:r>
+              <a:rPr lang="ru-RU" sz="1000" dirty="0">
+                <a:solidFill>
+                  <a:srgbClr val="2D2D2D"/>
+                </a:solidFill>
+                <a:latin typeface="Calibri" pitchFamily="34" charset="0"/>
+                <a:ea typeface="Calibri" pitchFamily="34" charset="-122"/>
+                <a:cs typeface="Calibri" pitchFamily="34" charset="-120"/>
+              </a:rPr>
+              <a:t>  2,2 млрд транзакций/год, 450+ организаций.</a:t>
+            </a:r>
+            <a:endParaRPr lang="ru-RU" sz="1000" dirty="0"/>
+          </a:p>
+          <a:p>
+            <a:pPr marL="0" indent="0">
+              <a:buNone/>
+            </a:pPr>
+            <a:r>
+              <a:rPr lang="ru-RU" sz="1000" dirty="0">
+                <a:solidFill>
+                  <a:srgbClr val="2D2D2D"/>
+                </a:solidFill>
+                <a:latin typeface="Calibri" pitchFamily="34" charset="0"/>
+                <a:ea typeface="Calibri" pitchFamily="34" charset="-122"/>
+                <a:cs typeface="Calibri" pitchFamily="34" charset="-120"/>
+              </a:rPr>
+              <a:t>e-Residency (2014) - 128 тыс. чел. из 185 стран, 342 млн евро в бюджет.</a:t>
+            </a:r>
+            <a:endParaRPr lang="ru-RU" sz="1000" dirty="0"/>
+          </a:p>
+          <a:p>
+            <a:pPr marL="0" indent="0">
+              <a:buNone/>
+            </a:pPr>
+            <a:r>
+              <a:rPr lang="ru-RU" sz="1000" dirty="0">
+                <a:solidFill>
+                  <a:srgbClr val="2D2D2D"/>
+                </a:solidFill>
+                <a:latin typeface="Calibri" pitchFamily="34" charset="0"/>
+                <a:ea typeface="Calibri" pitchFamily="34" charset="-122"/>
+                <a:cs typeface="Calibri" pitchFamily="34" charset="-120"/>
+              </a:rPr>
+              <a:t>Вывод: EGDI №2 - цифровое государство с нуля за 25 лет.</a:t>
+            </a:r>
+            <a:endParaRPr lang="ru-RU" sz="1000" dirty="0"/>
+          </a:p>
+        </p:txBody>
+      </p:sp>
+      <p:sp>
+        <p:nvSpPr>
+          <p:cNvPr id="12" name="Text 4b"/>
+          <p:cNvSpPr/>
+          <p:nvPr/>
+        </p:nvSpPr>
+        <p:spPr>
+          <a:xfrm>
+            <a:off x="457200" y="4070000"/>
+            <a:ext cx="8229600" cy="228600"/>
+          </a:xfrm>
+          <a:prstGeom prst="rect">
+            <a:avLst/>
+          </a:prstGeom>
+          <a:noFill/>
+          <a:ln/>
+        </p:spPr>
+        <p:txBody>
+          <a:bodyPr wrap="square" lIns="0" tIns="0" rIns="0" bIns="0" rtlCol="0" anchor="t"/>
+          <a:lstStyle/>
+          <a:p>
+            <a:pPr marL="0" indent="0">
+              <a:buNone/>
+            </a:pPr>
+            <a:r>
+              <a:rPr lang="ru-RU" sz="1000" b="1" dirty="0">
+                <a:solidFill>
+                  <a:srgbClr val="6D2E46"/>
+                </a:solidFill>
+                <a:latin typeface="Calibri" pitchFamily="34" charset="0"/>
+                <a:ea typeface="Calibri" pitchFamily="34" charset="-122"/>
+                <a:cs typeface="Calibri" pitchFamily="34" charset="-120"/>
+              </a:rPr>
+              <a:t>🇰🇷 Корея: </a:t>
+            </a:r>
+            <a:r>
+              <a:rPr lang="ru-RU" sz="1000" dirty="0">
+                <a:solidFill>
+                  <a:srgbClr val="2D2D2D"/>
+                </a:solidFill>
+                <a:latin typeface="Calibri" pitchFamily="34" charset="0"/>
+                <a:ea typeface="Calibri" pitchFamily="34" charset="-122"/>
+                <a:cs typeface="Calibri" pitchFamily="34" charset="-120"/>
+              </a:rPr>
+              <a:t>Digital New Deal (2020) - 160 трлн вон (5,9% ВВП): данные, 5G, ИИ.</a:t>
+            </a:r>
+            <a:endParaRPr lang="ru-RU" sz="1000" dirty="0"/>
+          </a:p>
+          <a:p>
+            <a:pPr marL="0" indent="0">
+              <a:buNone/>
+            </a:pPr>
+            <a:r>
+              <a:rPr lang="ru-RU" sz="1000" dirty="0">
+                <a:solidFill>
+                  <a:srgbClr val="2D2D2D"/>
+                </a:solidFill>
+                <a:latin typeface="Calibri" pitchFamily="34" charset="0"/>
+                <a:ea typeface="Calibri" pitchFamily="34" charset="-122"/>
+                <a:cs typeface="Calibri" pitchFamily="34" charset="-120"/>
+              </a:rPr>
+              <a:t>DNA-концепция: Data + Network + AI - единая цифровая экосистема.</a:t>
+            </a:r>
+            <a:endParaRPr lang="ru-RU" sz="1000" dirty="0"/>
+          </a:p>
+          <a:p>
+            <a:pPr marL="0" indent="0">
+              <a:buNone/>
+            </a:pPr>
+            <a:r>
+              <a:rPr lang="ru-RU" sz="1000" dirty="0">
+                <a:solidFill>
+                  <a:srgbClr val="2D2D2D"/>
+                </a:solidFill>
+                <a:latin typeface="Calibri" pitchFamily="34" charset="0"/>
+                <a:ea typeface="Calibri" pitchFamily="34" charset="-122"/>
+                <a:cs typeface="Calibri" pitchFamily="34" charset="-120"/>
+              </a:rPr>
+              <a:t>18 больниц с 5G и IoT, 310 000 классов с быстрым интернетом.</a:t>
+            </a:r>
+            <a:endParaRPr lang="ru-RU" sz="1000" dirty="0"/>
+          </a:p>
+          <a:p>
+            <a:pPr marL="0" indent="0">
+              <a:buNone/>
+            </a:pPr>
+            <a:r>
+              <a:rPr lang="ru-RU" sz="1000" dirty="0">
+                <a:solidFill>
+                  <a:srgbClr val="2D2D2D"/>
+                </a:solidFill>
+                <a:latin typeface="Calibri" pitchFamily="34" charset="0"/>
+                <a:ea typeface="Calibri" pitchFamily="34" charset="-122"/>
+                <a:cs typeface="Calibri" pitchFamily="34" charset="-120"/>
+              </a:rPr>
+              <a:t>ОЭСР Digital Government 2023: №1 - государство-дирижёр.</a:t>
+            </a:r>
+            <a:endParaRPr lang="ru-RU" sz="1000" dirty="0"/>
+          </a:p>
+          <a:p>
+            <a:pPr marL="0" indent="0">
+              <a:buNone/>
+            </a:pPr>
+            <a:r>
+              <a:rPr lang="ru-RU" sz="1000" dirty="0">
+                <a:solidFill>
+                  <a:srgbClr val="2D2D2D"/>
+                </a:solidFill>
+                <a:latin typeface="Calibri" pitchFamily="34" charset="0"/>
+                <a:ea typeface="Calibri" pitchFamily="34" charset="-122"/>
+                <a:cs typeface="Calibri" pitchFamily="34" charset="-120"/>
+              </a:rPr>
+              <a:t>Вывод: привязать цифровизацию к антикризисным бюджетным программам.</a:t>
+            </a:r>
+            <a:endParaRPr lang="ru-RU" sz="1000" dirty="0"/>
+          </a:p>
+        </p:txBody>
+      </p:sp>
+      <p:sp>
+        <p:nvSpPr>
+          <p:cNvPr id="13" name="Text 4c"/>
+          <p:cNvSpPr/>
+          <p:nvPr/>
+        </p:nvSpPr>
+        <p:spPr>
+          <a:xfrm>
+            <a:off x="457200" y="4270000"/>
+            <a:ext cx="8229600" cy="228600"/>
+          </a:xfrm>
+          <a:prstGeom prst="rect">
+            <a:avLst/>
+          </a:prstGeom>
+          <a:noFill/>
+          <a:ln/>
+        </p:spPr>
+        <p:txBody>
+          <a:bodyPr wrap="square" lIns="0" tIns="0" rIns="0" bIns="0" rtlCol="0" anchor="t"/>
+          <a:lstStyle/>
+          <a:p>
+            <a:pPr marL="0" indent="0">
+              <a:buNone/>
+            </a:pPr>
+            <a:r>
+              <a:rPr lang="ru-RU" sz="1000" b="1" dirty="0">
+                <a:solidFill>
+                  <a:srgbClr val="6D2E46"/>
+                </a:solidFill>
+                <a:latin typeface="Calibri" pitchFamily="34" charset="0"/>
+                <a:ea typeface="Calibri" pitchFamily="34" charset="-122"/>
+                <a:cs typeface="Calibri" pitchFamily="34" charset="-120"/>
+              </a:rPr>
+              <a:t>🇸🇬 Сингапур: </a:t>
+            </a:r>
+            <a:r>
+              <a:rPr lang="ru-RU" sz="1000" dirty="0">
+                <a:solidFill>
+                  <a:srgbClr val="2D2D2D"/>
+                </a:solidFill>
+                <a:latin typeface="Calibri" pitchFamily="34" charset="0"/>
+                <a:ea typeface="Calibri" pitchFamily="34" charset="-122"/>
+                <a:cs typeface="Calibri" pitchFamily="34" charset="-120"/>
+              </a:rPr>
+              <a:t>Smart Nation (2014) - 99% госуслуг онлайн, 99% домохозяйств в сети.</a:t>
+            </a:r>
+            <a:endParaRPr lang="ru-RU" sz="1000" dirty="0"/>
+          </a:p>
+          <a:p>
+            <a:pPr marL="0" indent="0">
+              <a:buNone/>
+            </a:pPr>
+            <a:r>
+              <a:rPr lang="ru-RU" sz="1000" dirty="0">
+                <a:solidFill>
+                  <a:srgbClr val="2D2D2D"/>
+                </a:solidFill>
+                <a:latin typeface="Calibri" pitchFamily="34" charset="0"/>
+                <a:ea typeface="Calibri" pitchFamily="34" charset="-122"/>
+                <a:cs typeface="Calibri" pitchFamily="34" charset="-120"/>
+              </a:rPr>
+              <a:t>Singpass - единый ID для всех услуг; PayNow - адресные выплаты за дни.</a:t>
+            </a:r>
+            <a:endParaRPr lang="ru-RU" sz="1000" dirty="0"/>
+          </a:p>
+          <a:p>
+            <a:pPr marL="0" indent="0">
+              <a:buNone/>
+            </a:pPr>
+            <a:r>
+              <a:rPr lang="ru-RU" sz="1000" dirty="0">
+                <a:solidFill>
+                  <a:srgbClr val="2D2D2D"/>
+                </a:solidFill>
+                <a:latin typeface="Calibri" pitchFamily="34" charset="0"/>
+                <a:ea typeface="Calibri" pitchFamily="34" charset="-122"/>
+                <a:cs typeface="Calibri" pitchFamily="34" charset="-120"/>
+              </a:rPr>
+              <a:t>Доля цифровой экономики в ВВП: 13,3% (2017) → 17,7% (2023).</a:t>
+            </a:r>
+            <a:endParaRPr lang="ru-RU" sz="1000" dirty="0"/>
+          </a:p>
+          <a:p>
+            <a:pPr marL="0" indent="0">
+              <a:buNone/>
+            </a:pPr>
+            <a:r>
+              <a:rPr lang="ru-RU" sz="1000" dirty="0">
+                <a:solidFill>
+                  <a:srgbClr val="2D2D2D"/>
+                </a:solidFill>
+                <a:latin typeface="Calibri" pitchFamily="34" charset="0"/>
+                <a:ea typeface="Calibri" pitchFamily="34" charset="-122"/>
+                <a:cs typeface="Calibri" pitchFamily="34" charset="-120"/>
+              </a:rPr>
+              <a:t>Smart Nation 2.0 (2024): акцент на генеративный ИИ, 120 млн SGD на науку.</a:t>
+            </a:r>
+            <a:endParaRPr lang="ru-RU" sz="1000" dirty="0"/>
+          </a:p>
+          <a:p>
+            <a:pPr marL="0" indent="0">
+              <a:buNone/>
+            </a:pPr>
+            <a:r>
+              <a:rPr lang="ru-RU" sz="1000" dirty="0">
+                <a:solidFill>
+                  <a:srgbClr val="2D2D2D"/>
+                </a:solidFill>
+                <a:latin typeface="Calibri" pitchFamily="34" charset="0"/>
+                <a:ea typeface="Calibri" pitchFamily="34" charset="-122"/>
+                <a:cs typeface="Calibri" pitchFamily="34" charset="-120"/>
+              </a:rPr>
+              <a:t>Вывод: IMD №1 - единый ID + быстрые платежи = антикризисный буфер.</a:t>
+            </a:r>
+            <a:endParaRPr lang="ru-RU" sz="1000" dirty="0"/>
+          </a:p>
+        </p:txBody>
+      </p:sp>
+      <p:sp>
+        <p:nvSpPr>
+          <p:cNvPr id="14" name="Text 4d"/>
+          <p:cNvSpPr/>
+          <p:nvPr/>
+        </p:nvSpPr>
+        <p:spPr>
+          <a:xfrm>
+            <a:off x="457200" y="4470000"/>
+            <a:ext cx="8229600" cy="228600"/>
+          </a:xfrm>
+          <a:prstGeom prst="rect">
+            <a:avLst/>
+          </a:prstGeom>
+          <a:noFill/>
+          <a:ln/>
+        </p:spPr>
+        <p:txBody>
+          <a:bodyPr wrap="square" lIns="0" tIns="0" rIns="0" bIns="0" rtlCol="0" anchor="t"/>
+          <a:lstStyle/>
+          <a:p>
+            <a:pPr marL="0" indent="0">
+              <a:buNone/>
+            </a:pPr>
+            <a:r>
+              <a:rPr lang="ru-RU" sz="1000" b="1" dirty="0">
+                <a:solidFill>
+                  <a:srgbClr val="6D2E46"/>
+                </a:solidFill>
+                <a:latin typeface="Calibri" pitchFamily="34" charset="0"/>
+                <a:ea typeface="Calibri" pitchFamily="34" charset="-122"/>
+                <a:cs typeface="Calibri" pitchFamily="34" charset="-120"/>
+              </a:rPr>
+              <a:t>🇵🇱 Польша: </a:t>
+            </a:r>
+            <a:r>
+              <a:rPr lang="ru-RU" sz="1000" dirty="0">
+                <a:solidFill>
+                  <a:srgbClr val="2D2D2D"/>
+                </a:solidFill>
+                <a:latin typeface="Calibri" pitchFamily="34" charset="0"/>
+                <a:ea typeface="Calibri" pitchFamily="34" charset="-122"/>
+                <a:cs typeface="Calibri" pitchFamily="34" charset="-120"/>
+              </a:rPr>
+              <a:t>«Цифровая Польша» 2014-2020 - 2,17 млрд евро из фондов ЕС.</a:t>
+            </a:r>
+            <a:endParaRPr lang="ru-RU" sz="1000" dirty="0"/>
+          </a:p>
+          <a:p>
+            <a:pPr marL="0" indent="0">
+              <a:buNone/>
+            </a:pPr>
+            <a:r>
+              <a:rPr lang="ru-RU" sz="1000" dirty="0">
+                <a:solidFill>
+                  <a:srgbClr val="2D2D2D"/>
+                </a:solidFill>
+                <a:latin typeface="Calibri" pitchFamily="34" charset="0"/>
+                <a:ea typeface="Calibri" pitchFamily="34" charset="-122"/>
+                <a:cs typeface="Calibri" pitchFamily="34" charset="-120"/>
+              </a:rPr>
+              <a:t>mObywatel (2017) - цифровой паспорт + 40+ госуслуг, 10 млн польз.</a:t>
+            </a:r>
+            <a:endParaRPr lang="ru-RU" sz="1000" dirty="0"/>
+          </a:p>
+          <a:p>
+            <a:pPr marL="0" indent="0">
+              <a:buNone/>
+            </a:pPr>
+            <a:r>
+              <a:rPr lang="ru-RU" sz="1000" dirty="0">
+                <a:solidFill>
+                  <a:srgbClr val="2D2D2D"/>
+                </a:solidFill>
+                <a:latin typeface="Calibri" pitchFamily="34" charset="0"/>
+                <a:ea typeface="Calibri" pitchFamily="34" charset="-122"/>
+                <a:cs typeface="Calibri" pitchFamily="34" charset="-120"/>
+              </a:rPr>
+              <a:t>Разрыв: е-правительство развито, но ИИ в бизнесе - лишь 3,7% (ЕС: 8%).</a:t>
+            </a:r>
+            <a:endParaRPr lang="ru-RU" sz="1000" dirty="0"/>
+          </a:p>
+          <a:p>
+            <a:pPr marL="0" indent="0">
+              <a:buNone/>
+            </a:pPr>
+            <a:r>
+              <a:rPr lang="ru-RU" sz="1000" dirty="0">
+                <a:solidFill>
+                  <a:srgbClr val="2D2D2D"/>
+                </a:solidFill>
+                <a:latin typeface="Calibri" pitchFamily="34" charset="0"/>
+                <a:ea typeface="Calibri" pitchFamily="34" charset="-122"/>
+                <a:cs typeface="Calibri" pitchFamily="34" charset="-120"/>
+              </a:rPr>
+              <a:t>Цифровые навыки населения: 44% (ниже среднего по ЕС - 56%).</a:t>
+            </a:r>
+            <a:endParaRPr lang="ru-RU" sz="1000" dirty="0"/>
+          </a:p>
+          <a:p>
+            <a:pPr marL="0" indent="0">
+              <a:buNone/>
+            </a:pPr>
+            <a:r>
+              <a:rPr lang="ru-RU" sz="1000" dirty="0">
+                <a:solidFill>
+                  <a:srgbClr val="2D2D2D"/>
+                </a:solidFill>
+                <a:latin typeface="Calibri" pitchFamily="34" charset="0"/>
+                <a:ea typeface="Calibri" pitchFamily="34" charset="-122"/>
+                <a:cs typeface="Calibri" pitchFamily="34" charset="-120"/>
+              </a:rPr>
+              <a:t>Вывод: не останавливаться на госсекторе - цифровизировать бизнес и людей.</a:t>
+            </a:r>
+            <a:endParaRPr lang="ru-RU" sz="1000" dirty="0"/>
+          </a:p>
+        </p:txBody>
+      </p:sp>
     </p:spTree>
   </p:cSld>
   <p:clrMapOvr>
